--- a/final_poster_template.pptx
+++ b/final_poster_template.pptx
@@ -478,7 +478,7 @@
           <a:p>
             <a:fld id="{B97A18B4-7299-4267-86DD-AEA5FF0EDE62}" type="datetimeFigureOut">
               <a:rPr lang="ko-KR" altLang="en-US" smtClean="0"/>
-              <a:t>2025. 11. 26.</a:t>
+              <a:t>2026-06-08</a:t>
             </a:fld>
             <a:endParaRPr lang="ko-KR" altLang="en-US"/>
           </a:p>
@@ -627,7 +627,7 @@
           <a:p>
             <a:fld id="{B97A18B4-7299-4267-86DD-AEA5FF0EDE62}" type="datetimeFigureOut">
               <a:rPr lang="ko-KR" altLang="en-US" smtClean="0"/>
-              <a:t>2025. 11. 26.</a:t>
+              <a:t>2026-06-08</a:t>
             </a:fld>
             <a:endParaRPr lang="ko-KR" altLang="en-US"/>
           </a:p>
@@ -746,7 +746,7 @@
           <a:p>
             <a:fld id="{B97A18B4-7299-4267-86DD-AEA5FF0EDE62}" type="datetimeFigureOut">
               <a:rPr lang="ko-KR" altLang="en-US" smtClean="0"/>
-              <a:t>2025. 11. 26.</a:t>
+              <a:t>2026-06-08</a:t>
             </a:fld>
             <a:endParaRPr lang="ko-KR" altLang="en-US"/>
           </a:p>
@@ -1485,7 +1485,7 @@
         <p:spPr>
           <a:xfrm>
             <a:off x="3935494" y="4524773"/>
-            <a:ext cx="3386568" cy="461665"/>
+            <a:ext cx="2756588" cy="461665"/>
           </a:xfrm>
           <a:prstGeom prst="rect">
             <a:avLst/>
@@ -1510,7 +1510,7 @@
                 <a:ea typeface="KoPubWorld돋움체 Bold" panose="00000800000000000000" pitchFamily="2" charset="-127"/>
                 <a:cs typeface="KoPubWorld돋움체 Bold" panose="00000800000000000000" pitchFamily="2" charset="-127"/>
               </a:rPr>
-              <a:t>Ex) Akihiko Yamada</a:t>
+              <a:t>Akihiko Yamada</a:t>
             </a:r>
             <a:endParaRPr lang="ko-KR" altLang="en-US" sz="3000" dirty="0">
               <a:solidFill>
@@ -1600,7 +1600,7 @@
         <p:spPr>
           <a:xfrm>
             <a:off x="11434034" y="3652228"/>
-            <a:ext cx="3074560" cy="461665"/>
+            <a:ext cx="4448334" cy="461665"/>
           </a:xfrm>
           <a:prstGeom prst="rect">
             <a:avLst/>
@@ -1625,18 +1625,7 @@
                 <a:ea typeface="KoPubWorld돋움체 Bold" panose="00000800000000000000" pitchFamily="2" charset="-127"/>
                 <a:cs typeface="KoPubWorld돋움체 Bold" panose="00000800000000000000" pitchFamily="2" charset="-127"/>
               </a:rPr>
-              <a:t>Ex) SNU </a:t>
-            </a:r>
-            <a:r>
-              <a:rPr lang="en-US" altLang="ko-KR" sz="3000" dirty="0" err="1">
-                <a:solidFill>
-                  <a:schemeClr val="bg1"/>
-                </a:solidFill>
-                <a:latin typeface="KoPubWorld돋움체 Bold" panose="00000800000000000000" pitchFamily="2" charset="-127"/>
-                <a:ea typeface="KoPubWorld돋움체 Bold" panose="00000800000000000000" pitchFamily="2" charset="-127"/>
-                <a:cs typeface="KoPubWorld돋움체 Bold" panose="00000800000000000000" pitchFamily="2" charset="-127"/>
-              </a:rPr>
-              <a:t>Colledge</a:t>
+              <a:t>College of Liberal Studies</a:t>
             </a:r>
             <a:endParaRPr lang="ko-KR" altLang="en-US" sz="3000" dirty="0">
               <a:solidFill>
@@ -1726,7 +1715,7 @@
         <p:spPr>
           <a:xfrm>
             <a:off x="11434034" y="4533222"/>
-            <a:ext cx="1389804" cy="461665"/>
+            <a:ext cx="1154162" cy="461665"/>
           </a:xfrm>
           <a:prstGeom prst="rect">
             <a:avLst/>
@@ -1743,7 +1732,7 @@
               <a:defRPr/>
             </a:pPr>
             <a:r>
-              <a:rPr lang="en-US" altLang="ko-KR" sz="3000" dirty="0">
+              <a:rPr lang="ko-KR" altLang="en-US" sz="3000" dirty="0">
                 <a:solidFill>
                   <a:schemeClr val="bg1"/>
                 </a:solidFill>
@@ -1751,16 +1740,8 @@
                 <a:ea typeface="KoPubWorld돋움체 Bold" panose="00000800000000000000" pitchFamily="2" charset="-127"/>
                 <a:cs typeface="KoPubWorld돋움체 Bold" panose="00000800000000000000" pitchFamily="2" charset="-127"/>
               </a:rPr>
-              <a:t>Ex) AAA</a:t>
+              <a:t>이준수</a:t>
             </a:r>
-            <a:endParaRPr lang="ko-KR" altLang="en-US" sz="3000" dirty="0">
-              <a:solidFill>
-                <a:schemeClr val="bg1"/>
-              </a:solidFill>
-              <a:latin typeface="KoPubWorld돋움체 Bold" panose="00000800000000000000" pitchFamily="2" charset="-127"/>
-              <a:ea typeface="KoPubWorld돋움체 Bold" panose="00000800000000000000" pitchFamily="2" charset="-127"/>
-              <a:cs typeface="KoPubWorld돋움체 Bold" panose="00000800000000000000" pitchFamily="2" charset="-127"/>
-            </a:endParaRPr>
           </a:p>
         </p:txBody>
       </p:sp>
@@ -5200,7 +5181,7 @@
     <mc:Choice Requires="p14">
       <p:transition/>
     </mc:Choice>
-    <mc:Fallback xmlns:dsp="http://schemas.microsoft.com/office/drawing/2008/diagram" xmlns:dgm="http://schemas.openxmlformats.org/drawingml/2006/diagram" xmlns:c="http://schemas.openxmlformats.org/drawingml/2006/chart" xmlns="">
+    <mc:Fallback xmlns="" xmlns:c="http://schemas.openxmlformats.org/drawingml/2006/chart" xmlns:dgm="http://schemas.openxmlformats.org/drawingml/2006/diagram" xmlns:dsp="http://schemas.microsoft.com/office/drawing/2008/diagram">
       <p:transition/>
     </mc:Fallback>
   </mc:AlternateContent>
